--- a/gestao-combustivel/relatorios/Apresentacao_Diretoria_Combustivel.pptx
+++ b/gestao-combustivel/relatorios/Apresentacao_Diretoria_Combustivel.pptx
@@ -5572,7 +5572,7 @@
                             <a:srgbClr val="000000"/>
                           </a:solidFill>
                         </a:rPr>
-                        <a:t>2026-09-14</a:t>
+                        <a:t>14/09/2026</a:t>
                       </a:r>
                       <a:endParaRPr lang="en-US" sz="1200" dirty="0"/>
                     </a:p>
@@ -5864,7 +5864,7 @@
                             <a:srgbClr val="000000"/>
                           </a:solidFill>
                         </a:rPr>
-                        <a:t>2026-09-14</a:t>
+                        <a:t>14/09/2026</a:t>
                       </a:r>
                       <a:endParaRPr lang="en-US" sz="1200" dirty="0"/>
                     </a:p>
@@ -6156,7 +6156,7 @@
                             <a:srgbClr val="000000"/>
                           </a:solidFill>
                         </a:rPr>
-                        <a:t>2026-09-14</a:t>
+                        <a:t>14/09/2026</a:t>
                       </a:r>
                       <a:endParaRPr lang="en-US" sz="1200" dirty="0"/>
                     </a:p>
@@ -6448,7 +6448,7 @@
                             <a:srgbClr val="000000"/>
                           </a:solidFill>
                         </a:rPr>
-                        <a:t>2026-09-13</a:t>
+                        <a:t>13/09/2026</a:t>
                       </a:r>
                       <a:endParaRPr lang="en-US" sz="1200" dirty="0"/>
                     </a:p>
@@ -6624,7 +6624,7 @@
                             <a:srgbClr val="C0392B"/>
                           </a:solidFill>
                         </a:rPr>
-                        <a:t>Sem reporte em todo o período observado</a:t>
+                        <a:t>Sem reporte em todo o período</a:t>
                       </a:r>
                       <a:endParaRPr lang="en-US" sz="1150" dirty="0"/>
                     </a:p>
@@ -6740,7 +6740,7 @@
                             <a:srgbClr val="000000"/>
                           </a:solidFill>
                         </a:rPr>
-                        <a:t>2026-09-14</a:t>
+                        <a:t>14/09/2026</a:t>
                       </a:r>
                       <a:endParaRPr lang="en-US" sz="1200" dirty="0"/>
                     </a:p>
@@ -6916,7 +6916,7 @@
                             <a:srgbClr val="C0392B"/>
                           </a:solidFill>
                         </a:rPr>
-                        <a:t>Sem reporte em todo o período observado</a:t>
+                        <a:t>Sem reporte em todo o período</a:t>
                       </a:r>
                       <a:endParaRPr lang="en-US" sz="1150" dirty="0"/>
                     </a:p>
@@ -7032,7 +7032,7 @@
                             <a:srgbClr val="000000"/>
                           </a:solidFill>
                         </a:rPr>
-                        <a:t>2026-09-14</a:t>
+                        <a:t>14/09/2026</a:t>
                       </a:r>
                       <a:endParaRPr lang="en-US" sz="1200" dirty="0"/>
                     </a:p>
